--- a/dist/초5/사회·역사/국토와생활/초5_사회·역사_국토와생활_03_인구와도시.pptx
+++ b/dist/초5/사회·역사/국토와생활/초5_사회·역사_국토와생활_03_인구와도시.pptx
@@ -121,13 +121,13 @@
   <p:extLst>
     <p:ext uri="{521415D9-36F7-43E2-AB2F-B90AF26B5E84}">
       <p14:sectionLst xmlns:p14="http://schemas.microsoft.com/office/powerpoint/2010/main">
-        <p14:section name="도입" id="{d36aa53b-fe08-3ac4-0033-4249318c175e}">
+        <p14:section name="도입" id="{98f72160-ff64-0a20-d4da-0444bd58850e}">
           <p14:sldIdLst>
             <p14:sldId id="256"/>
             <p14:sldId id="257"/>
           </p14:sldIdLst>
         </p14:section>
-        <p14:section name="개념" id="{05864b63-9e2c-609a-8384-48c3cc29d211}">
+        <p14:section name="개념" id="{1399935e-2546-2535-7a47-e6757c58c9c8}">
           <p14:sldIdLst>
             <p14:sldId id="258"/>
             <p14:sldId id="259"/>
@@ -135,7 +135,7 @@
             <p14:sldId id="263"/>
           </p14:sldIdLst>
         </p14:section>
-        <p14:section name="연습" id="{4c51982f-df82-957c-d13b-4f53bf524030}">
+        <p14:section name="연습" id="{1f568482-12e8-e750-1dc3-10b5dd7a01f5}">
           <p14:sldIdLst>
             <p14:sldId id="260"/>
             <p14:sldId id="261"/>
@@ -143,25 +143,25 @@
             <p14:sldId id="265"/>
           </p14:sldIdLst>
         </p14:section>
-        <p14:section name="개념" id="{06f61539-630a-66d2-d0b1-9765816f640c}">
+        <p14:section name="개념" id="{380eef82-4910-272e-37b7-ab4a4edfd13a}">
           <p14:sldIdLst/>
         </p14:section>
-        <p14:section name="연습" id="{24c84f00-fd00-d4a9-4c4a-d0a8aca7fe12}">
+        <p14:section name="연습" id="{91fdc5a2-1254-4321-c803-e9adea20be56}">
           <p14:sldIdLst/>
         </p14:section>
-        <p14:section name="확인" id="{269f21ba-af0f-edc1-91e5-26c0c3c0a1d6}">
+        <p14:section name="확인" id="{b9176201-6a42-11e5-349e-090af361b57e}">
           <p14:sldIdLst>
             <p14:sldId id="266"/>
             <p14:sldId id="267"/>
             <p14:sldId id="268"/>
           </p14:sldIdLst>
         </p14:section>
-        <p14:section name="정리" id="{03ee8125-5d71-7ff0-85cc-6f4127c0705e}">
+        <p14:section name="정리" id="{3aa52a32-312f-a13a-23bd-c031be1a3dd0}">
           <p14:sldIdLst>
             <p14:sldId id="269"/>
           </p14:sldIdLst>
         </p14:section>
-        <p14:section name="보충" id="{b19246da-bda8-444c-1e5d-7d9f5c9ab9c4}">
+        <p14:section name="보충" id="{8b73579a-806c-05d2-0d93-8d3c6e829c57}">
           <p14:sldIdLst>
             <p14:sldId id="270"/>
           </p14:sldIdLst>
